--- a/apresentacao_executiva_tcc.pptx
+++ b/apresentacao_executiva_tcc.pptx
@@ -5022,7 +5022,7 @@
                 </a:solidFill>
                 <a:latin typeface="Calibri"/>
               </a:rPr>
-              <a:t>O gap varia de -20,9% a -2,0% entre estados (random slope HLM, N=7,7M). Estados pobres concentram mais discriminacao.</a:t>
+              <a:t>O gap varia de -19.8% a -2.2% entre estados (random slope HLM, N=7.689.426). Estados pobres concentram mais discriminacao.</a:t>
             </a:r>
           </a:p>
         </p:txBody>
@@ -5539,7 +5539,7 @@
                 </a:solidFill>
                 <a:latin typeface="Calibri"/>
               </a:rPr>
-              <a:t>R$ 73 bilhoes</a:t>
+              <a:t>+127,3%</a:t>
             </a:r>
           </a:p>
         </p:txBody>
@@ -5574,8 +5574,8 @@
                 </a:solidFill>
                 <a:latin typeface="Calibri"/>
               </a:rPr>
-              <a:t>estimativa da perda de producao anual por sub-utilizacao de capital humano negro
-(proxy: equalizar CBO = +127,3% de renda para negros qualificados)</a:t>
+              <a:t>ganho de renda para negros se tivessem a mesma distribuicao ocupacional (CBO) que brancos
+— simulacao com dados reais PNAD 2025 (run_hipoteses_estado.py)</a:t>
             </a:r>
           </a:p>
         </p:txBody>
@@ -5696,7 +5696,7 @@
                 </a:solidFill>
                 <a:latin typeface="Calibri"/>
               </a:rPr>
-              <a:t>+74,3 p.p. de PIB</a:t>
+              <a:t>+74,3 p.p.</a:t>
             </a:r>
           </a:p>
         </p:txBody>
@@ -5731,8 +5731,8 @@
                 </a:solidFill>
                 <a:latin typeface="Calibri"/>
               </a:rPr>
-              <a:t>ganho potencial de inclusao produtiva plena se negros tivessem mesma distribuicao
-ocupacional que brancos (Hsieh et al., 2019 — metodologia adaptada)</a:t>
+              <a:t>proxy de ganho produtivo agregado (127,3% x participacao negra na forca de trabalho ~58%)
+— proxy conservador, nao e estimativa de PIB formal (Hsieh et al., 2019 como referencia)</a:t>
             </a:r>
           </a:p>
         </p:txBody>
@@ -5888,8 +5888,8 @@
                 </a:solidFill>
                 <a:latin typeface="Calibri"/>
               </a:rPr>
-              <a:t>tempo necessario para eliminar o gap racial ao ritmo atual de convergencia
-espontanea (~0,02 log-pontos por ano, sem intervencao de politica publica)</a:t>
+              <a:t>tempo para eliminar o gap ao ritmo atual de convergencia espontanea
+— tendencia temporal: delta = 0,001 log-pt/ano (WLS 2016-2025, p=0,077 — nao significativo)</a:t>
             </a:r>
           </a:p>
         </p:txBody>
@@ -6431,8 +6431,8 @@
                 </a:solidFill>
                 <a:latin typeface="Calibri"/>
               </a:rPr>
-              <a:t>▸  Negros tem 29,6% menos chance de obter
-ocupacao qualificada (GLMM)</a:t>
+              <a:t>▸  Negros tem 30,9% menos chance de obter
+ocupacao qualificada (GLMM M2)</a:t>
             </a:r>
           </a:p>
         </p:txBody>
@@ -8854,7 +8854,7 @@
               </a:rPr>
               <a:t>Mesmo com EDUCACAO, SEXO, IDADE e BAIRRO
 IDENTICOS aos de um branco, um trabalhador
-negro tem 29,6% MENOS chance de trabalho qualificado.</a:t>
+negro tem 30,9% MENOS chance de trabalho qualificado.</a:t>
             </a:r>
           </a:p>
         </p:txBody>
@@ -9732,9 +9732,10 @@
                 </a:solidFill>
                 <a:latin typeface="Calibri"/>
               </a:rPr>
-              <a:t>Gap de 7,4% na mediana (q50)
-para 10,0% no topo (q90)
-— glass ceiling formal confirmado</a:t>
+              <a:t>Gap de 8,0% na mediana (q50)
+para 11,8% no topo (q90)
+— glass ceiling formal confirmado
+(QR global sem controles ocupacionais)</a:t>
             </a:r>
           </a:p>
         </p:txBody>

--- a/apresentacao_executiva_tcc.pptx
+++ b/apresentacao_executiva_tcc.pptx
@@ -5022,7 +5022,7 @@
                 </a:solidFill>
                 <a:latin typeface="Calibri"/>
               </a:rPr>
-              <a:t>O gap varia de -19.8% a -2.2% entre estados (random slope HLM, N=7.689.426). Estados pobres concentram mais discriminacao.</a:t>
+              <a:t>O gap varia de -19.8% a -2.2% entre estados (random slope HLM, N=7.689.426). Estados mais ricos (DF, RJ, SP) concentram a MAIOR penalidade.</a:t>
             </a:r>
           </a:p>
         </p:txBody>
@@ -5143,7 +5143,7 @@
                 </a:solidFill>
                 <a:latin typeface="Calibri"/>
               </a:rPr>
-              <a:t>Politicas precisam ser especificas</a:t>
+              <a:t>Politicas precisam ser especificas e focalizadas</a:t>
             </a:r>
           </a:p>
         </p:txBody>
@@ -5178,7 +5178,7 @@
                 </a:solidFill>
                 <a:latin typeface="Calibri"/>
               </a:rPr>
-              <a:t>Cotas ocupacionais (CBO) + mentoria de redes atacam 84% do problema. Transparencia salarial ataca o restante.</a:t>
+              <a:t>Cotas ocupacionais (CBO) + mentoria atacam 84% do problema. E focalizar o orcamento nas UFs de maior penalidade rende +68,2% vs. distribuicao uniforme (DF, Norte primeiro).</a:t>
             </a:r>
           </a:p>
         </p:txBody>
@@ -10554,397 +10554,40 @@
           </a:p>
         </p:txBody>
       </p:sp>
-      <p:sp>
-        <p:nvSpPr>
-          <p:cNvPr id="10" name="Rectangle 9"/>
+      <p:pic>
+        <p:nvPicPr>
+          <p:cNvPr id="10" name="Picture 9" descr="mapa_po_regional.png"/>
+          <p:cNvPicPr>
+            <a:picLocks noChangeAspect="1"/>
+          </p:cNvPicPr>
+          <p:nvPr/>
+        </p:nvPicPr>
+        <p:blipFill>
+          <a:blip r:embed="rId3"/>
+          <a:stretch>
+            <a:fillRect/>
+          </a:stretch>
+        </p:blipFill>
+        <p:spPr>
+          <a:xfrm>
+            <a:off x="6903720" y="1371600"/>
+            <a:ext cx="3931920" cy="4397826"/>
+          </a:xfrm>
+          <a:prstGeom prst="rect">
+            <a:avLst/>
+          </a:prstGeom>
+        </p:spPr>
+      </p:pic>
+      <p:sp>
+        <p:nvSpPr>
+          <p:cNvPr id="11" name="Rectangle 10"/>
           <p:cNvSpPr/>
           <p:nvPr/>
         </p:nvSpPr>
         <p:spPr>
           <a:xfrm>
-            <a:off x="6309360" y="1508760"/>
-            <a:ext cx="5394960" cy="1280160"/>
-          </a:xfrm>
-          <a:prstGeom prst="rect">
-            <a:avLst/>
-          </a:prstGeom>
-          <a:solidFill>
-            <a:srgbClr val="1A0505"/>
-          </a:solidFill>
-          <a:ln w="19050">
-            <a:solidFill>
-              <a:srgbClr val="B71C1C"/>
-            </a:solidFill>
-          </a:ln>
-        </p:spPr>
-        <p:style>
-          <a:lnRef idx="1">
-            <a:schemeClr val="accent1"/>
-          </a:lnRef>
-          <a:fillRef idx="3">
-            <a:schemeClr val="accent1"/>
-          </a:fillRef>
-          <a:effectRef idx="2">
-            <a:schemeClr val="accent1"/>
-          </a:effectRef>
-          <a:fontRef idx="minor">
-            <a:schemeClr val="lt1"/>
-          </a:fontRef>
-        </p:style>
-        <p:txBody>
-          <a:bodyPr rtlCol="0" anchor="ctr"/>
-          <a:lstStyle/>
-          <a:p>
-            <a:pPr algn="ctr"/>
-          </a:p>
-        </p:txBody>
-      </p:sp>
-      <p:sp>
-        <p:nvSpPr>
-          <p:cNvPr id="11" name="TextBox 10"/>
-          <p:cNvSpPr txBox="1"/>
-          <p:nvPr/>
-        </p:nvSpPr>
-        <p:spPr>
-          <a:xfrm>
-            <a:off x="6419088" y="1581912"/>
-            <a:ext cx="5175504" cy="347472"/>
-          </a:xfrm>
-          <a:prstGeom prst="rect">
-            <a:avLst/>
-          </a:prstGeom>
-          <a:noFill/>
-        </p:spPr>
-        <p:txBody>
-          <a:bodyPr wrap="square">
-            <a:spAutoFit/>
-          </a:bodyPr>
-          <a:lstStyle/>
-          <a:p>
-            <a:pPr algn="l"/>
-            <a:r>
-              <a:rPr sz="1200" b="0" i="0">
-                <a:solidFill>
-                  <a:srgbClr val="BBDEFB"/>
-                </a:solidFill>
-                <a:latin typeface="Calibri"/>
-              </a:rPr>
-              <a:t>Gap medio (efeito fixo)</a:t>
-            </a:r>
-          </a:p>
-        </p:txBody>
-      </p:sp>
-      <p:sp>
-        <p:nvSpPr>
-          <p:cNvPr id="12" name="TextBox 11"/>
-          <p:cNvSpPr txBox="1"/>
-          <p:nvPr/>
-        </p:nvSpPr>
-        <p:spPr>
-          <a:xfrm>
-            <a:off x="6419088" y="1892808"/>
-            <a:ext cx="5175504" cy="777240"/>
-          </a:xfrm>
-          <a:prstGeom prst="rect">
-            <a:avLst/>
-          </a:prstGeom>
-          <a:noFill/>
-        </p:spPr>
-        <p:txBody>
-          <a:bodyPr wrap="square">
-            <a:spAutoFit/>
-          </a:bodyPr>
-          <a:lstStyle/>
-          <a:p>
-            <a:pPr algn="ctr"/>
-            <a:r>
-              <a:rPr sz="3600" b="1" i="0">
-                <a:solidFill>
-                  <a:srgbClr val="B71C1C"/>
-                </a:solidFill>
-                <a:latin typeface="Calibri"/>
-              </a:rPr>
-              <a:t>11.5%</a:t>
-            </a:r>
-          </a:p>
-        </p:txBody>
-      </p:sp>
-      <p:sp>
-        <p:nvSpPr>
-          <p:cNvPr id="13" name="TextBox 12"/>
-          <p:cNvSpPr txBox="1"/>
-          <p:nvPr/>
-        </p:nvSpPr>
-        <p:spPr>
-          <a:xfrm>
-            <a:off x="6419088" y="2697480"/>
-            <a:ext cx="5175504" cy="347472"/>
-          </a:xfrm>
-          <a:prstGeom prst="rect">
-            <a:avLst/>
-          </a:prstGeom>
-          <a:noFill/>
-        </p:spPr>
-        <p:txBody>
-          <a:bodyPr wrap="square">
-            <a:spAutoFit/>
-          </a:bodyPr>
-          <a:lstStyle/>
-          <a:p>
-            <a:pPr algn="l"/>
-            <a:r>
-              <a:rPr sz="1000" b="0" i="1">
-                <a:solidFill>
-                  <a:srgbClr val="616161"/>
-                </a:solidFill>
-                <a:latin typeface="Calibri"/>
-              </a:rPr>
-              <a:t>penalidade salarial racial media nacional</a:t>
-            </a:r>
-          </a:p>
-        </p:txBody>
-      </p:sp>
-      <p:sp>
-        <p:nvSpPr>
-          <p:cNvPr id="14" name="Rectangle 13"/>
-          <p:cNvSpPr/>
-          <p:nvPr/>
-        </p:nvSpPr>
-        <p:spPr>
-          <a:xfrm>
-            <a:off x="6309360" y="2907792"/>
-            <a:ext cx="5394960" cy="1051560"/>
-          </a:xfrm>
-          <a:prstGeom prst="rect">
-            <a:avLst/>
-          </a:prstGeom>
-          <a:solidFill>
-            <a:srgbClr val="F5F5F5"/>
-          </a:solidFill>
-          <a:ln w="15240">
-            <a:solidFill>
-              <a:srgbClr val="FF8F00"/>
-            </a:solidFill>
-          </a:ln>
-        </p:spPr>
-        <p:style>
-          <a:lnRef idx="1">
-            <a:schemeClr val="accent1"/>
-          </a:lnRef>
-          <a:fillRef idx="3">
-            <a:schemeClr val="accent1"/>
-          </a:fillRef>
-          <a:effectRef idx="2">
-            <a:schemeClr val="accent1"/>
-          </a:effectRef>
-          <a:fontRef idx="minor">
-            <a:schemeClr val="lt1"/>
-          </a:fontRef>
-        </p:style>
-        <p:txBody>
-          <a:bodyPr rtlCol="0" anchor="ctr"/>
-          <a:lstStyle/>
-          <a:p>
-            <a:pPr algn="ctr"/>
-          </a:p>
-        </p:txBody>
-      </p:sp>
-      <p:sp>
-        <p:nvSpPr>
-          <p:cNvPr id="15" name="TextBox 14"/>
-          <p:cNvSpPr txBox="1"/>
-          <p:nvPr/>
-        </p:nvSpPr>
-        <p:spPr>
-          <a:xfrm>
-            <a:off x="6446520" y="2944368"/>
-            <a:ext cx="5120640" cy="320040"/>
-          </a:xfrm>
-          <a:prstGeom prst="rect">
-            <a:avLst/>
-          </a:prstGeom>
-          <a:noFill/>
-        </p:spPr>
-        <p:txBody>
-          <a:bodyPr wrap="square">
-            <a:spAutoFit/>
-          </a:bodyPr>
-          <a:lstStyle/>
-          <a:p>
-            <a:pPr algn="l"/>
-            <a:r>
-              <a:rPr sz="1200" b="1" i="0">
-                <a:solidFill>
-                  <a:srgbClr val="FF8F00"/>
-                </a:solidFill>
-                <a:latin typeface="Calibri"/>
-              </a:rPr>
-              <a:t>Variacao entre estados (95% das UFs):</a:t>
-            </a:r>
-          </a:p>
-        </p:txBody>
-      </p:sp>
-      <p:sp>
-        <p:nvSpPr>
-          <p:cNvPr id="16" name="TextBox 15"/>
-          <p:cNvSpPr txBox="1"/>
-          <p:nvPr/>
-        </p:nvSpPr>
-        <p:spPr>
-          <a:xfrm>
-            <a:off x="6446520" y="3291840"/>
-            <a:ext cx="5120640" cy="502920"/>
-          </a:xfrm>
-          <a:prstGeom prst="rect">
-            <a:avLst/>
-          </a:prstGeom>
-          <a:noFill/>
-        </p:spPr>
-        <p:txBody>
-          <a:bodyPr wrap="square">
-            <a:spAutoFit/>
-          </a:bodyPr>
-          <a:lstStyle/>
-          <a:p>
-            <a:pPr algn="l"/>
-            <a:r>
-              <a:rPr sz="2200" b="1" i="0">
-                <a:solidFill>
-                  <a:srgbClr val="1F3864"/>
-                </a:solidFill>
-                <a:latin typeface="Calibri"/>
-              </a:rPr>
-              <a:t>de -19.8% ate -2.2% — amplitude de 17.6 pp</a:t>
-            </a:r>
-          </a:p>
-        </p:txBody>
-      </p:sp>
-      <p:sp>
-        <p:nvSpPr>
-          <p:cNvPr id="17" name="Rectangle 16"/>
-          <p:cNvSpPr/>
-          <p:nvPr/>
-        </p:nvSpPr>
-        <p:spPr>
-          <a:xfrm>
-            <a:off x="6309360" y="4069080"/>
-            <a:ext cx="5394960" cy="1051560"/>
-          </a:xfrm>
-          <a:prstGeom prst="rect">
-            <a:avLst/>
-          </a:prstGeom>
-          <a:solidFill>
-            <a:srgbClr val="F5F5F5"/>
-          </a:solidFill>
-          <a:ln w="15240">
-            <a:solidFill>
-              <a:srgbClr val="1565C0"/>
-            </a:solidFill>
-          </a:ln>
-        </p:spPr>
-        <p:style>
-          <a:lnRef idx="1">
-            <a:schemeClr val="accent1"/>
-          </a:lnRef>
-          <a:fillRef idx="3">
-            <a:schemeClr val="accent1"/>
-          </a:fillRef>
-          <a:effectRef idx="2">
-            <a:schemeClr val="accent1"/>
-          </a:effectRef>
-          <a:fontRef idx="minor">
-            <a:schemeClr val="lt1"/>
-          </a:fontRef>
-        </p:style>
-        <p:txBody>
-          <a:bodyPr rtlCol="0" anchor="ctr"/>
-          <a:lstStyle/>
-          <a:p>
-            <a:pPr algn="ctr"/>
-          </a:p>
-        </p:txBody>
-      </p:sp>
-      <p:sp>
-        <p:nvSpPr>
-          <p:cNvPr id="18" name="TextBox 17"/>
-          <p:cNvSpPr txBox="1"/>
-          <p:nvPr/>
-        </p:nvSpPr>
-        <p:spPr>
-          <a:xfrm>
-            <a:off x="6446520" y="4105656"/>
-            <a:ext cx="5120640" cy="320040"/>
-          </a:xfrm>
-          <a:prstGeom prst="rect">
-            <a:avLst/>
-          </a:prstGeom>
-          <a:noFill/>
-        </p:spPr>
-        <p:txBody>
-          <a:bodyPr wrap="square">
-            <a:spAutoFit/>
-          </a:bodyPr>
-          <a:lstStyle/>
-          <a:p>
-            <a:pPr algn="l"/>
-            <a:r>
-              <a:rPr sz="1200" b="1" i="0">
-                <a:solidFill>
-                  <a:srgbClr val="1565C0"/>
-                </a:solidFill>
-                <a:latin typeface="Calibri"/>
-              </a:rPr>
-              <a:t>Correlacao estado rico x gap racial: rho = -0.372</a:t>
-            </a:r>
-          </a:p>
-        </p:txBody>
-      </p:sp>
-      <p:sp>
-        <p:nvSpPr>
-          <p:cNvPr id="19" name="TextBox 18"/>
-          <p:cNvSpPr txBox="1"/>
-          <p:nvPr/>
-        </p:nvSpPr>
-        <p:spPr>
-          <a:xfrm>
-            <a:off x="6446520" y="4453128"/>
-            <a:ext cx="5120640" cy="621792"/>
-          </a:xfrm>
-          <a:prstGeom prst="rect">
-            <a:avLst/>
-          </a:prstGeom>
-          <a:noFill/>
-        </p:spPr>
-        <p:txBody>
-          <a:bodyPr wrap="square">
-            <a:spAutoFit/>
-          </a:bodyPr>
-          <a:lstStyle/>
-          <a:p>
-            <a:pPr algn="l"/>
-            <a:r>
-              <a:rPr sz="1250" b="0" i="0">
-                <a:solidFill>
-                  <a:srgbClr val="212121"/>
-                </a:solidFill>
-                <a:latin typeface="Calibri"/>
-              </a:rPr>
-              <a:t>Estados mais pobres concentram maior penalidade racial.
-Politicas nacionais uniformes ignoram essa heterogeneidade.</a:t>
-            </a:r>
-          </a:p>
-        </p:txBody>
-      </p:sp>
-      <p:sp>
-        <p:nvSpPr>
-          <p:cNvPr id="20" name="Rectangle 19"/>
-          <p:cNvSpPr/>
-          <p:nvPr/>
-        </p:nvSpPr>
-        <p:spPr>
-          <a:xfrm>
-            <a:off x="6309360" y="5230368"/>
-            <a:ext cx="5394960" cy="804672"/>
+            <a:off x="6309360" y="5870448"/>
+            <a:ext cx="5577840" cy="603504"/>
           </a:xfrm>
           <a:prstGeom prst="rect">
             <a:avLst/>
@@ -10982,14 +10625,14 @@
       </p:sp>
       <p:sp>
         <p:nvSpPr>
-          <p:cNvPr id="21" name="TextBox 20"/>
-          <p:cNvSpPr txBox="1"/>
-          <p:nvPr/>
-        </p:nvSpPr>
-        <p:spPr>
-          <a:xfrm>
-            <a:off x="6446520" y="5276088"/>
-            <a:ext cx="5120640" cy="685800"/>
+          <p:cNvPr id="12" name="TextBox 11"/>
+          <p:cNvSpPr txBox="1"/>
+          <p:nvPr/>
+        </p:nvSpPr>
+        <p:spPr>
+          <a:xfrm>
+            <a:off x="6400800" y="5907024"/>
+            <a:ext cx="5394960" cy="530352"/>
           </a:xfrm>
           <a:prstGeom prst="rect">
             <a:avLst/>
@@ -11004,20 +10647,20 @@
           <a:p>
             <a:pPr algn="l"/>
             <a:r>
-              <a:rPr sz="1200" b="1" i="0">
+              <a:rPr sz="1050" b="1" i="0">
                 <a:solidFill>
                   <a:srgbClr val="1F3864"/>
                 </a:solidFill>
                 <a:latin typeface="Calibri"/>
               </a:rPr>
-              <a:t>LRT boundary test: LR=7612 | p&lt;0,001*** — variacao geografica CONFIRMADA (N=7.689.426)</a:t>
-            </a:r>
-          </a:p>
-        </p:txBody>
-      </p:sp>
-      <p:sp>
-        <p:nvSpPr>
-          <p:cNvPr id="22" name="Rectangle 21"/>
+              <a:t>Amplitude -20% a -2% entre UFs | LRT LR=7612, p&lt;0,001*** — maior penalidade nos estados mais ricos (DF, RJ, SP), nao nos mais pobres.</a:t>
+            </a:r>
+          </a:p>
+        </p:txBody>
+      </p:sp>
+      <p:sp>
+        <p:nvSpPr>
+          <p:cNvPr id="13" name="Rectangle 12"/>
           <p:cNvSpPr/>
           <p:nvPr/>
         </p:nvSpPr>
@@ -11058,7 +10701,7 @@
       </p:sp>
       <p:sp>
         <p:nvSpPr>
-          <p:cNvPr id="23" name="TextBox 22"/>
+          <p:cNvPr id="14" name="TextBox 13"/>
           <p:cNvSpPr txBox="1"/>
           <p:nvPr/>
         </p:nvSpPr>
@@ -11093,7 +10736,7 @@
       </p:sp>
       <p:sp>
         <p:nvSpPr>
-          <p:cNvPr id="24" name="TextBox 23"/>
+          <p:cNvPr id="15" name="TextBox 14"/>
           <p:cNvSpPr txBox="1"/>
           <p:nvPr/>
         </p:nvSpPr>
@@ -14221,13 +13864,13 @@
           <a:p>
             <a:pPr algn="ctr"/>
             <a:r>
-              <a:rPr sz="1150" b="1" i="0">
+              <a:rPr sz="1100" b="1" i="0">
                 <a:solidFill>
                   <a:srgbClr val="1F3864"/>
                 </a:solidFill>
                 <a:latin typeface="Calibri"/>
               </a:rPr>
-              <a:t>Pareto (lambda=0,5): combinacao otima = Eixo 1 (cotas) + Eixo 3 (mentoria). Atuacao isolada em remuneracao e insuficiente.</a:t>
+              <a:t>Pareto: cotas (Eixo 1) + mentoria (Eixo 3) = combinacao otima. E focalizar o orcamento nas UFs de maior penalidade (DF, Norte) rende +68,2% vs. distribuicao uniforme.</a:t>
             </a:r>
           </a:p>
         </p:txBody>

--- a/apresentacao_executiva_tcc.pptx
+++ b/apresentacao_executiva_tcc.pptx
@@ -10145,16 +10145,20 @@
         </p:nvSpPr>
         <p:spPr>
           <a:xfrm>
-            <a:off x="0" y="6601968"/>
-            <a:ext cx="12188952" cy="256032"/>
+            <a:off x="274320" y="5806440"/>
+            <a:ext cx="11612880" cy="502920"/>
           </a:xfrm>
           <a:prstGeom prst="rect">
             <a:avLst/>
           </a:prstGeom>
           <a:solidFill>
-            <a:srgbClr val="1F3864"/>
+            <a:srgbClr val="F3E5F5"/>
           </a:solidFill>
-          <a:ln/>
+          <a:ln w="12700">
+            <a:solidFill>
+              <a:srgbClr val="1F3864"/>
+            </a:solidFill>
+          </a:ln>
         </p:spPr>
         <p:style>
           <a:lnRef idx="1">
@@ -10186,6 +10190,82 @@
         </p:nvSpPr>
         <p:spPr>
           <a:xfrm>
+            <a:off x="457200" y="5843016"/>
+            <a:ext cx="11247120" cy="438912"/>
+          </a:xfrm>
+          <a:prstGeom prst="rect">
+            <a:avLst/>
+          </a:prstGeom>
+          <a:noFill/>
+        </p:spPr>
+        <p:txBody>
+          <a:bodyPr wrap="square">
+            <a:spAutoFit/>
+          </a:bodyPr>
+          <a:lstStyle/>
+          <a:p>
+            <a:pPr algn="ctr"/>
+            <a:r>
+              <a:rPr sz="1100" b="1" i="0">
+                <a:solidFill>
+                  <a:srgbClr val="1F3864"/>
+                </a:solidFill>
+                <a:latin typeface="Calibri"/>
+              </a:rPr>
+              <a:t>Genero (GLMM random slope): o teto de vidro feminino e de RENDA, nao de categoria — mulheres acessam ocupacoes qualificadas (OR=2,01) mas nao o topo de renda (OR top10=0,522).</a:t>
+            </a:r>
+          </a:p>
+        </p:txBody>
+      </p:sp>
+      <p:sp>
+        <p:nvSpPr>
+          <p:cNvPr id="23" name="Rectangle 22"/>
+          <p:cNvSpPr/>
+          <p:nvPr/>
+        </p:nvSpPr>
+        <p:spPr>
+          <a:xfrm>
+            <a:off x="0" y="6601968"/>
+            <a:ext cx="12188952" cy="256032"/>
+          </a:xfrm>
+          <a:prstGeom prst="rect">
+            <a:avLst/>
+          </a:prstGeom>
+          <a:solidFill>
+            <a:srgbClr val="1F3864"/>
+          </a:solidFill>
+          <a:ln/>
+        </p:spPr>
+        <p:style>
+          <a:lnRef idx="1">
+            <a:schemeClr val="accent1"/>
+          </a:lnRef>
+          <a:fillRef idx="3">
+            <a:schemeClr val="accent1"/>
+          </a:fillRef>
+          <a:effectRef idx="2">
+            <a:schemeClr val="accent1"/>
+          </a:effectRef>
+          <a:fontRef idx="minor">
+            <a:schemeClr val="lt1"/>
+          </a:fontRef>
+        </p:style>
+        <p:txBody>
+          <a:bodyPr rtlCol="0" anchor="ctr"/>
+          <a:lstStyle/>
+          <a:p>
+            <a:pPr algn="ctr"/>
+          </a:p>
+        </p:txBody>
+      </p:sp>
+      <p:sp>
+        <p:nvSpPr>
+          <p:cNvPr id="24" name="TextBox 23"/>
+          <p:cNvSpPr txBox="1"/>
+          <p:nvPr/>
+        </p:nvSpPr>
+        <p:spPr>
+          <a:xfrm>
             <a:off x="137160" y="6629400"/>
             <a:ext cx="10515600" cy="228600"/>
           </a:xfrm>
@@ -10215,7 +10295,7 @@
       </p:sp>
       <p:sp>
         <p:nvSpPr>
-          <p:cNvPr id="23" name="TextBox 22"/>
+          <p:cNvPr id="25" name="TextBox 24"/>
           <p:cNvSpPr txBox="1"/>
           <p:nvPr/>
         </p:nvSpPr>

--- a/apresentacao_executiva_tcc.pptx
+++ b/apresentacao_executiva_tcc.pptx
@@ -10651,7 +10651,7 @@
         <p:spPr>
           <a:xfrm>
             <a:off x="6903720" y="1371600"/>
-            <a:ext cx="3931920" cy="4397826"/>
+            <a:ext cx="3931920" cy="3809481"/>
           </a:xfrm>
           <a:prstGeom prst="rect">
             <a:avLst/>

--- a/apresentacao_executiva_tcc.pptx
+++ b/apresentacao_executiva_tcc.pptx
@@ -4334,7 +4334,7 @@
                 </a:solidFill>
                 <a:latin typeface="Calibri"/>
               </a:rPr>
-              <a:t>0,691</a:t>
+              <a:t>0,693</a:t>
             </a:r>
           </a:p>
         </p:txBody>
@@ -5022,7 +5022,7 @@
                 </a:solidFill>
                 <a:latin typeface="Calibri"/>
               </a:rPr>
-              <a:t>O gap varia de -19.8% a -2.2% entre estados (random slope HLM, N=7.689.426). Estados mais ricos (DF, RJ, SP) concentram a MAIOR penalidade.</a:t>
+              <a:t>O gap varia de -19.7% a -2.1% entre estados (random slope HLM, N=7.689.426). Estados mais ricos (DF, RJ, SP) concentram a MAIOR penalidade.</a:t>
             </a:r>
           </a:p>
         </p:txBody>
@@ -6431,7 +6431,7 @@
                 </a:solidFill>
                 <a:latin typeface="Calibri"/>
               </a:rPr>
-              <a:t>▸  Negros tem 30,9% menos chance de obter
+              <a:t>▸  Negros tem 30,7% menos chance de obter
 ocupacao qualificada (GLMM M2)</a:t>
             </a:r>
           </a:p>
@@ -8587,7 +8587,7 @@
                 </a:solidFill>
                 <a:latin typeface="Calibri"/>
               </a:rPr>
-              <a:t>0,691</a:t>
+              <a:t>0,693</a:t>
             </a:r>
           </a:p>
         </p:txBody>
@@ -8737,7 +8737,7 @@
                 </a:solidFill>
                 <a:latin typeface="Calibri"/>
               </a:rPr>
-              <a:t>−4,84 p.p.</a:t>
+              <a:t>−4,75 p.p.</a:t>
             </a:r>
           </a:p>
         </p:txBody>
@@ -8854,7 +8854,7 @@
               </a:rPr>
               <a:t>Mesmo com EDUCACAO, SEXO, IDADE e BAIRRO
 IDENTICOS aos de um branco, um trabalhador
-negro tem 30,9% MENOS chance de trabalho qualificado.</a:t>
+negro tem 30,7% MENOS chance de trabalho qualificado.</a:t>
             </a:r>
           </a:p>
         </p:txBody>
@@ -10212,7 +10212,7 @@
                 </a:solidFill>
                 <a:latin typeface="Calibri"/>
               </a:rPr>
-              <a:t>Genero (GLMM random slope): o teto de vidro feminino e de RENDA, nao de categoria — mulheres acessam ocupacoes qualificadas (OR=2,01) mas nao o topo de renda (OR top10=0,522).</a:t>
+              <a:t>Genero (GLMM random slope): o teto de vidro feminino e de RENDA, nao de categoria — mulheres acessam ocupacoes qualificadas (OR=1,99) mas nao o topo de renda (OR top10=0,518).</a:t>
             </a:r>
           </a:p>
         </p:txBody>
@@ -10733,7 +10733,7 @@
                 </a:solidFill>
                 <a:latin typeface="Calibri"/>
               </a:rPr>
-              <a:t>Amplitude -20% a -2% entre UFs | LRT LR=7612, p&lt;0,001*** — maior penalidade nos estados mais ricos (DF, RJ, SP), nao nos mais pobres.</a:t>
+              <a:t>Amplitude -20% a -2% entre UFs | LRT LR=7548, p&lt;0,001*** — maior penalidade nos estados mais ricos (DF, RJ, SP), nao nos mais pobres.</a:t>
             </a:r>
           </a:p>
         </p:txBody>
@@ -11431,7 +11431,7 @@
                 </a:solidFill>
                 <a:latin typeface="Calibri"/>
               </a:rPr>
-              <a:t>E &gt;= 2,25x</a:t>
+              <a:t>E &gt;= 2,24x</a:t>
             </a:r>
           </a:p>
         </p:txBody>

--- a/apresentacao_executiva_tcc.pptx
+++ b/apresentacao_executiva_tcc.pptx
@@ -15,6 +15,7 @@
     <p:sldId id="263" r:id="rId14"/>
     <p:sldId id="264" r:id="rId15"/>
     <p:sldId id="265" r:id="rId16"/>
+    <p:sldId id="266" r:id="rId17"/>
   </p:sldIdLst>
   <p:sldSz cx="12188952" cy="6858000" type="screen4x3"/>
   <p:notesSz cx="6858000" cy="9144000"/>
@@ -3851,7 +3852,7 @@
         <p:spPr>
           <a:xfrm>
             <a:off x="0" y="0"/>
-            <a:ext cx="12188952" cy="6858000"/>
+            <a:ext cx="12188952" cy="960120"/>
           </a:xfrm>
           <a:prstGeom prst="rect">
             <a:avLst/>
@@ -3885,14 +3886,108 @@
       </p:sp>
       <p:sp>
         <p:nvSpPr>
-          <p:cNvPr id="3" name="Rectangle 2"/>
+          <p:cNvPr id="3" name="TextBox 2"/>
+          <p:cNvSpPr txBox="1"/>
+          <p:nvPr/>
+        </p:nvSpPr>
+        <p:spPr>
+          <a:xfrm>
+            <a:off x="320040" y="64008"/>
+            <a:ext cx="11430000" cy="502920"/>
+          </a:xfrm>
+          <a:prstGeom prst="rect">
+            <a:avLst/>
+          </a:prstGeom>
+          <a:noFill/>
+        </p:spPr>
+        <p:txBody>
+          <a:bodyPr wrap="square">
+            <a:spAutoFit/>
+          </a:bodyPr>
+          <a:lstStyle/>
+          <a:p>
+            <a:pPr algn="l"/>
+            <a:r>
+              <a:rPr sz="2700" b="1" i="0">
+                <a:solidFill>
+                  <a:srgbClr val="FFFFFF"/>
+                </a:solidFill>
+                <a:latin typeface="Calibri"/>
+              </a:rPr>
+              <a:t>9. Interseccionalidade — O Teto de Vidro Recai sobre a Mulher Negra</a:t>
+            </a:r>
+          </a:p>
+        </p:txBody>
+      </p:sp>
+      <p:sp>
+        <p:nvSpPr>
+          <p:cNvPr id="4" name="TextBox 3"/>
+          <p:cNvSpPr txBox="1"/>
+          <p:nvPr/>
+        </p:nvSpPr>
+        <p:spPr>
+          <a:xfrm>
+            <a:off x="320040" y="576072"/>
+            <a:ext cx="11430000" cy="320040"/>
+          </a:xfrm>
+          <a:prstGeom prst="rect">
+            <a:avLst/>
+          </a:prstGeom>
+          <a:noFill/>
+        </p:spPr>
+        <p:txBody>
+          <a:bodyPr wrap="square">
+            <a:spAutoFit/>
+          </a:bodyPr>
+          <a:lstStyle/>
+          <a:p>
+            <a:pPr algn="l"/>
+            <a:r>
+              <a:rPr sz="1350" b="0" i="0">
+                <a:solidFill>
+                  <a:srgbClr val="BBDEFB"/>
+                </a:solidFill>
+                <a:latin typeface="Calibri"/>
+              </a:rPr>
+              <a:t>4 grupos raca x genero (ref. homem branco): alcada no acesso, a mais excluida no topo da renda</a:t>
+            </a:r>
+          </a:p>
+        </p:txBody>
+      </p:sp>
+      <p:pic>
+        <p:nvPicPr>
+          <p:cNvPr id="5" name="Picture 4" descr="grupo_rg_interseccional.png"/>
+          <p:cNvPicPr>
+            <a:picLocks noChangeAspect="1"/>
+          </p:cNvPicPr>
+          <p:nvPr/>
+        </p:nvPicPr>
+        <p:blipFill>
+          <a:blip r:embed="rId2"/>
+          <a:stretch>
+            <a:fillRect/>
+          </a:stretch>
+        </p:blipFill>
+        <p:spPr>
+          <a:xfrm>
+            <a:off x="365760" y="1188720"/>
+            <a:ext cx="6949440" cy="4595360"/>
+          </a:xfrm>
+          <a:prstGeom prst="rect">
+            <a:avLst/>
+          </a:prstGeom>
+        </p:spPr>
+      </p:pic>
+      <p:sp>
+        <p:nvSpPr>
+          <p:cNvPr id="6" name="Rectangle 5"/>
           <p:cNvSpPr/>
           <p:nvPr/>
         </p:nvSpPr>
         <p:spPr>
           <a:xfrm>
-            <a:off x="0" y="0"/>
-            <a:ext cx="12188952" cy="685800"/>
+            <a:off x="7589520" y="1371600"/>
+            <a:ext cx="4206240" cy="1645920"/>
           </a:xfrm>
           <a:prstGeom prst="rect">
             <a:avLst/>
@@ -3900,7 +3995,11 @@
           <a:solidFill>
             <a:srgbClr val="0D1F3C"/>
           </a:solidFill>
-          <a:ln/>
+          <a:ln w="19050">
+            <a:solidFill>
+              <a:srgbClr val="FF8F00"/>
+            </a:solidFill>
+          </a:ln>
         </p:spPr>
         <p:style>
           <a:lnRef idx="1">
@@ -3926,6 +4025,552 @@
       </p:sp>
       <p:sp>
         <p:nvSpPr>
+          <p:cNvPr id="7" name="TextBox 6"/>
+          <p:cNvSpPr txBox="1"/>
+          <p:nvPr/>
+        </p:nvSpPr>
+        <p:spPr>
+          <a:xfrm>
+            <a:off x="7699248" y="1444752"/>
+            <a:ext cx="3986784" cy="347472"/>
+          </a:xfrm>
+          <a:prstGeom prst="rect">
+            <a:avLst/>
+          </a:prstGeom>
+          <a:noFill/>
+        </p:spPr>
+        <p:txBody>
+          <a:bodyPr wrap="square">
+            <a:spAutoFit/>
+          </a:bodyPr>
+          <a:lstStyle/>
+          <a:p>
+            <a:pPr algn="l"/>
+            <a:r>
+              <a:rPr sz="1200" b="0" i="0">
+                <a:solidFill>
+                  <a:srgbClr val="BBDEFB"/>
+                </a:solidFill>
+                <a:latin typeface="Calibri"/>
+              </a:rPr>
+              <a:t>Mulher negra — acesso (CBO 1-4)</a:t>
+            </a:r>
+          </a:p>
+        </p:txBody>
+      </p:sp>
+      <p:sp>
+        <p:nvSpPr>
+          <p:cNvPr id="8" name="TextBox 7"/>
+          <p:cNvSpPr txBox="1"/>
+          <p:nvPr/>
+        </p:nvSpPr>
+        <p:spPr>
+          <a:xfrm>
+            <a:off x="7699248" y="1755648"/>
+            <a:ext cx="3986784" cy="777240"/>
+          </a:xfrm>
+          <a:prstGeom prst="rect">
+            <a:avLst/>
+          </a:prstGeom>
+          <a:noFill/>
+        </p:spPr>
+        <p:txBody>
+          <a:bodyPr wrap="square">
+            <a:spAutoFit/>
+          </a:bodyPr>
+          <a:lstStyle/>
+          <a:p>
+            <a:pPr algn="ctr"/>
+            <a:r>
+              <a:rPr sz="3600" b="1" i="0">
+                <a:solidFill>
+                  <a:srgbClr val="1565C0"/>
+                </a:solidFill>
+                <a:latin typeface="Calibri"/>
+              </a:rPr>
+              <a:t>OR 1,33</a:t>
+            </a:r>
+          </a:p>
+        </p:txBody>
+      </p:sp>
+      <p:sp>
+        <p:nvSpPr>
+          <p:cNvPr id="9" name="TextBox 8"/>
+          <p:cNvSpPr txBox="1"/>
+          <p:nvPr/>
+        </p:nvSpPr>
+        <p:spPr>
+          <a:xfrm>
+            <a:off x="7699248" y="2560320"/>
+            <a:ext cx="3986784" cy="347472"/>
+          </a:xfrm>
+          <a:prstGeom prst="rect">
+            <a:avLst/>
+          </a:prstGeom>
+          <a:noFill/>
+        </p:spPr>
+        <p:txBody>
+          <a:bodyPr wrap="square">
+            <a:spAutoFit/>
+          </a:bodyPr>
+          <a:lstStyle/>
+          <a:p>
+            <a:pPr algn="l"/>
+            <a:r>
+              <a:rPr sz="1000" b="0" i="1">
+                <a:solidFill>
+                  <a:srgbClr val="616161"/>
+                </a:solidFill>
+                <a:latin typeface="Calibri"/>
+              </a:rPr>
+              <a:t>acima do homem branco (profissoes feminizadas)</a:t>
+            </a:r>
+          </a:p>
+        </p:txBody>
+      </p:sp>
+      <p:sp>
+        <p:nvSpPr>
+          <p:cNvPr id="10" name="Rectangle 9"/>
+          <p:cNvSpPr/>
+          <p:nvPr/>
+        </p:nvSpPr>
+        <p:spPr>
+          <a:xfrm>
+            <a:off x="7589520" y="3291840"/>
+            <a:ext cx="4206240" cy="1645920"/>
+          </a:xfrm>
+          <a:prstGeom prst="rect">
+            <a:avLst/>
+          </a:prstGeom>
+          <a:solidFill>
+            <a:srgbClr val="0D1F3C"/>
+          </a:solidFill>
+          <a:ln w="19050">
+            <a:solidFill>
+              <a:srgbClr val="FF8F00"/>
+            </a:solidFill>
+          </a:ln>
+        </p:spPr>
+        <p:style>
+          <a:lnRef idx="1">
+            <a:schemeClr val="accent1"/>
+          </a:lnRef>
+          <a:fillRef idx="3">
+            <a:schemeClr val="accent1"/>
+          </a:fillRef>
+          <a:effectRef idx="2">
+            <a:schemeClr val="accent1"/>
+          </a:effectRef>
+          <a:fontRef idx="minor">
+            <a:schemeClr val="lt1"/>
+          </a:fontRef>
+        </p:style>
+        <p:txBody>
+          <a:bodyPr rtlCol="0" anchor="ctr"/>
+          <a:lstStyle/>
+          <a:p>
+            <a:pPr algn="ctr"/>
+          </a:p>
+        </p:txBody>
+      </p:sp>
+      <p:sp>
+        <p:nvSpPr>
+          <p:cNvPr id="11" name="TextBox 10"/>
+          <p:cNvSpPr txBox="1"/>
+          <p:nvPr/>
+        </p:nvSpPr>
+        <p:spPr>
+          <a:xfrm>
+            <a:off x="7699248" y="3364992"/>
+            <a:ext cx="3986784" cy="347472"/>
+          </a:xfrm>
+          <a:prstGeom prst="rect">
+            <a:avLst/>
+          </a:prstGeom>
+          <a:noFill/>
+        </p:spPr>
+        <p:txBody>
+          <a:bodyPr wrap="square">
+            <a:spAutoFit/>
+          </a:bodyPr>
+          <a:lstStyle/>
+          <a:p>
+            <a:pPr algn="l"/>
+            <a:r>
+              <a:rPr sz="1200" b="0" i="0">
+                <a:solidFill>
+                  <a:srgbClr val="BBDEFB"/>
+                </a:solidFill>
+                <a:latin typeface="Calibri"/>
+              </a:rPr>
+              <a:t>Mulher negra — topo 10% renda</a:t>
+            </a:r>
+          </a:p>
+        </p:txBody>
+      </p:sp>
+      <p:sp>
+        <p:nvSpPr>
+          <p:cNvPr id="12" name="TextBox 11"/>
+          <p:cNvSpPr txBox="1"/>
+          <p:nvPr/>
+        </p:nvSpPr>
+        <p:spPr>
+          <a:xfrm>
+            <a:off x="7699248" y="3675888"/>
+            <a:ext cx="3986784" cy="777240"/>
+          </a:xfrm>
+          <a:prstGeom prst="rect">
+            <a:avLst/>
+          </a:prstGeom>
+          <a:noFill/>
+        </p:spPr>
+        <p:txBody>
+          <a:bodyPr wrap="square">
+            <a:spAutoFit/>
+          </a:bodyPr>
+          <a:lstStyle/>
+          <a:p>
+            <a:pPr algn="ctr"/>
+            <a:r>
+              <a:rPr sz="3600" b="1" i="0">
+                <a:solidFill>
+                  <a:srgbClr val="B71C1C"/>
+                </a:solidFill>
+                <a:latin typeface="Calibri"/>
+              </a:rPr>
+              <a:t>OR 0,34</a:t>
+            </a:r>
+          </a:p>
+        </p:txBody>
+      </p:sp>
+      <p:sp>
+        <p:nvSpPr>
+          <p:cNvPr id="13" name="TextBox 12"/>
+          <p:cNvSpPr txBox="1"/>
+          <p:nvPr/>
+        </p:nvSpPr>
+        <p:spPr>
+          <a:xfrm>
+            <a:off x="7699248" y="4480560"/>
+            <a:ext cx="3986784" cy="347472"/>
+          </a:xfrm>
+          <a:prstGeom prst="rect">
+            <a:avLst/>
+          </a:prstGeom>
+          <a:noFill/>
+        </p:spPr>
+        <p:txBody>
+          <a:bodyPr wrap="square">
+            <a:spAutoFit/>
+          </a:bodyPr>
+          <a:lstStyle/>
+          <a:p>
+            <a:pPr algn="l"/>
+            <a:r>
+              <a:rPr sz="1000" b="0" i="1">
+                <a:solidFill>
+                  <a:srgbClr val="616161"/>
+                </a:solidFill>
+                <a:latin typeface="Calibri"/>
+              </a:rPr>
+              <a:t>a MAIS excluida de todos os grupos</a:t>
+            </a:r>
+          </a:p>
+        </p:txBody>
+      </p:sp>
+      <p:sp>
+        <p:nvSpPr>
+          <p:cNvPr id="14" name="Rectangle 13"/>
+          <p:cNvSpPr/>
+          <p:nvPr/>
+        </p:nvSpPr>
+        <p:spPr>
+          <a:xfrm>
+            <a:off x="365760" y="5897880"/>
+            <a:ext cx="11430000" cy="566928"/>
+          </a:xfrm>
+          <a:prstGeom prst="rect">
+            <a:avLst/>
+          </a:prstGeom>
+          <a:solidFill>
+            <a:srgbClr val="E3F2FD"/>
+          </a:solidFill>
+          <a:ln w="10160">
+            <a:solidFill>
+              <a:srgbClr val="1F3864"/>
+            </a:solidFill>
+          </a:ln>
+        </p:spPr>
+        <p:style>
+          <a:lnRef idx="1">
+            <a:schemeClr val="accent1"/>
+          </a:lnRef>
+          <a:fillRef idx="3">
+            <a:schemeClr val="accent1"/>
+          </a:fillRef>
+          <a:effectRef idx="2">
+            <a:schemeClr val="accent1"/>
+          </a:effectRef>
+          <a:fontRef idx="minor">
+            <a:schemeClr val="lt1"/>
+          </a:fontRef>
+        </p:style>
+        <p:txBody>
+          <a:bodyPr rtlCol="0" anchor="ctr"/>
+          <a:lstStyle/>
+          <a:p>
+            <a:pPr algn="ctr"/>
+          </a:p>
+        </p:txBody>
+      </p:sp>
+      <p:sp>
+        <p:nvSpPr>
+          <p:cNvPr id="15" name="TextBox 14"/>
+          <p:cNvSpPr txBox="1"/>
+          <p:nvPr/>
+        </p:nvSpPr>
+        <p:spPr>
+          <a:xfrm>
+            <a:off x="548640" y="5943600"/>
+            <a:ext cx="11064240" cy="475488"/>
+          </a:xfrm>
+          <a:prstGeom prst="rect">
+            <a:avLst/>
+          </a:prstGeom>
+          <a:noFill/>
+        </p:spPr>
+        <p:txBody>
+          <a:bodyPr wrap="square">
+            <a:spAutoFit/>
+          </a:bodyPr>
+          <a:lstStyle/>
+          <a:p>
+            <a:pPr algn="ctr"/>
+            <a:r>
+              <a:rPr sz="1200" b="1" i="0">
+                <a:solidFill>
+                  <a:srgbClr val="1F3864"/>
+                </a:solidFill>
+                <a:latin typeface="Calibri"/>
+              </a:rPr>
+              <a:t>A mulher negra pode ENTRAR em ocupacoes qualificadas, mas e barrada de CHEGAR AO TOPO da remuneracao: o teto de vidro nao e racial nem sexualmente neutro — combina os dois eixos onde mais importa.</a:t>
+            </a:r>
+          </a:p>
+        </p:txBody>
+      </p:sp>
+      <p:sp>
+        <p:nvSpPr>
+          <p:cNvPr id="16" name="Rectangle 15"/>
+          <p:cNvSpPr/>
+          <p:nvPr/>
+        </p:nvSpPr>
+        <p:spPr>
+          <a:xfrm>
+            <a:off x="0" y="6601968"/>
+            <a:ext cx="12188952" cy="256032"/>
+          </a:xfrm>
+          <a:prstGeom prst="rect">
+            <a:avLst/>
+          </a:prstGeom>
+          <a:solidFill>
+            <a:srgbClr val="1F3864"/>
+          </a:solidFill>
+          <a:ln/>
+        </p:spPr>
+        <p:style>
+          <a:lnRef idx="1">
+            <a:schemeClr val="accent1"/>
+          </a:lnRef>
+          <a:fillRef idx="3">
+            <a:schemeClr val="accent1"/>
+          </a:fillRef>
+          <a:effectRef idx="2">
+            <a:schemeClr val="accent1"/>
+          </a:effectRef>
+          <a:fontRef idx="minor">
+            <a:schemeClr val="lt1"/>
+          </a:fontRef>
+        </p:style>
+        <p:txBody>
+          <a:bodyPr rtlCol="0" anchor="ctr"/>
+          <a:lstStyle/>
+          <a:p>
+            <a:pPr algn="ctr"/>
+          </a:p>
+        </p:txBody>
+      </p:sp>
+      <p:sp>
+        <p:nvSpPr>
+          <p:cNvPr id="17" name="TextBox 16"/>
+          <p:cNvSpPr txBox="1"/>
+          <p:nvPr/>
+        </p:nvSpPr>
+        <p:spPr>
+          <a:xfrm>
+            <a:off x="137160" y="6629400"/>
+            <a:ext cx="10515600" cy="228600"/>
+          </a:xfrm>
+          <a:prstGeom prst="rect">
+            <a:avLst/>
+          </a:prstGeom>
+          <a:noFill/>
+        </p:spPr>
+        <p:txBody>
+          <a:bodyPr wrap="square">
+            <a:spAutoFit/>
+          </a:bodyPr>
+          <a:lstStyle/>
+          <a:p>
+            <a:pPr algn="l"/>
+            <a:r>
+              <a:rPr sz="800" b="0" i="0">
+                <a:solidFill>
+                  <a:srgbClr val="BBDEFB"/>
+                </a:solidFill>
+                <a:latin typeface="Calibri"/>
+              </a:rPr>
+              <a:t>Ricardo Calheiros  |  MBA USP/ESALQ  |  Racismo Estrutural e Mercado de Trabalho  |  Versao Executiva</a:t>
+            </a:r>
+          </a:p>
+        </p:txBody>
+      </p:sp>
+      <p:sp>
+        <p:nvSpPr>
+          <p:cNvPr id="18" name="TextBox 17"/>
+          <p:cNvSpPr txBox="1"/>
+          <p:nvPr/>
+        </p:nvSpPr>
+        <p:spPr>
+          <a:xfrm>
+            <a:off x="11612880" y="6629400"/>
+            <a:ext cx="457200" cy="228600"/>
+          </a:xfrm>
+          <a:prstGeom prst="rect">
+            <a:avLst/>
+          </a:prstGeom>
+          <a:noFill/>
+        </p:spPr>
+        <p:txBody>
+          <a:bodyPr wrap="square">
+            <a:spAutoFit/>
+          </a:bodyPr>
+          <a:lstStyle/>
+          <a:p>
+            <a:pPr algn="r"/>
+            <a:r>
+              <a:rPr sz="800" b="0" i="0">
+                <a:solidFill>
+                  <a:srgbClr val="FFFFFF"/>
+                </a:solidFill>
+                <a:latin typeface="Calibri"/>
+              </a:rPr>
+              <a:t>10/11</a:t>
+            </a:r>
+          </a:p>
+        </p:txBody>
+      </p:sp>
+    </p:spTree>
+  </p:cSld>
+  <p:clrMapOvr>
+    <a:masterClrMapping/>
+  </p:clrMapOvr>
+</p:sld>
+</file>
+
+<file path=ppt/slides/slide11.xml><?xml version="1.0" encoding="utf-8"?>
+<p:sld xmlns:a="http://schemas.openxmlformats.org/drawingml/2006/main" xmlns:p="http://schemas.openxmlformats.org/presentationml/2006/main" xmlns:r="http://schemas.openxmlformats.org/officeDocument/2006/relationships">
+  <p:cSld>
+    <p:spTree>
+      <p:nvGrpSpPr>
+        <p:cNvPr id="1" name=""/>
+        <p:cNvGrpSpPr/>
+        <p:nvPr/>
+      </p:nvGrpSpPr>
+      <p:grpSpPr/>
+      <p:sp>
+        <p:nvSpPr>
+          <p:cNvPr id="2" name="Rectangle 1"/>
+          <p:cNvSpPr/>
+          <p:nvPr/>
+        </p:nvSpPr>
+        <p:spPr>
+          <a:xfrm>
+            <a:off x="0" y="0"/>
+            <a:ext cx="12188952" cy="6858000"/>
+          </a:xfrm>
+          <a:prstGeom prst="rect">
+            <a:avLst/>
+          </a:prstGeom>
+          <a:solidFill>
+            <a:srgbClr val="1F3864"/>
+          </a:solidFill>
+          <a:ln/>
+        </p:spPr>
+        <p:style>
+          <a:lnRef idx="1">
+            <a:schemeClr val="accent1"/>
+          </a:lnRef>
+          <a:fillRef idx="3">
+            <a:schemeClr val="accent1"/>
+          </a:fillRef>
+          <a:effectRef idx="2">
+            <a:schemeClr val="accent1"/>
+          </a:effectRef>
+          <a:fontRef idx="minor">
+            <a:schemeClr val="lt1"/>
+          </a:fontRef>
+        </p:style>
+        <p:txBody>
+          <a:bodyPr rtlCol="0" anchor="ctr"/>
+          <a:lstStyle/>
+          <a:p>
+            <a:pPr algn="ctr"/>
+          </a:p>
+        </p:txBody>
+      </p:sp>
+      <p:sp>
+        <p:nvSpPr>
+          <p:cNvPr id="3" name="Rectangle 2"/>
+          <p:cNvSpPr/>
+          <p:nvPr/>
+        </p:nvSpPr>
+        <p:spPr>
+          <a:xfrm>
+            <a:off x="0" y="0"/>
+            <a:ext cx="12188952" cy="685800"/>
+          </a:xfrm>
+          <a:prstGeom prst="rect">
+            <a:avLst/>
+          </a:prstGeom>
+          <a:solidFill>
+            <a:srgbClr val="0D1F3C"/>
+          </a:solidFill>
+          <a:ln/>
+        </p:spPr>
+        <p:style>
+          <a:lnRef idx="1">
+            <a:schemeClr val="accent1"/>
+          </a:lnRef>
+          <a:fillRef idx="3">
+            <a:schemeClr val="accent1"/>
+          </a:fillRef>
+          <a:effectRef idx="2">
+            <a:schemeClr val="accent1"/>
+          </a:effectRef>
+          <a:fontRef idx="minor">
+            <a:schemeClr val="lt1"/>
+          </a:fontRef>
+        </p:style>
+        <p:txBody>
+          <a:bodyPr rtlCol="0" anchor="ctr"/>
+          <a:lstStyle/>
+          <a:p>
+            <a:pPr algn="ctr"/>
+          </a:p>
+        </p:txBody>
+      </p:sp>
+      <p:sp>
+        <p:nvSpPr>
           <p:cNvPr id="4" name="TextBox 3"/>
           <p:cNvSpPr txBox="1"/>
           <p:nvPr/>
@@ -3954,7 +4599,7 @@
                 </a:solidFill>
                 <a:latin typeface="Calibri"/>
               </a:rPr>
-              <a:t>9. Conclusao — O Que Este Trabalho Prova</a:t>
+              <a:t>10. Conclusao — O Que Este Trabalho Prova</a:t>
             </a:r>
           </a:p>
         </p:txBody>
@@ -5185,7 +5830,42 @@
       </p:sp>
       <p:sp>
         <p:nvSpPr>
-          <p:cNvPr id="37" name="Rectangle 36"/>
+          <p:cNvPr id="37" name="TextBox 36"/>
+          <p:cNvSpPr txBox="1"/>
+          <p:nvPr/>
+        </p:nvSpPr>
+        <p:spPr>
+          <a:xfrm>
+            <a:off x="548640" y="5998464"/>
+            <a:ext cx="11155680" cy="384048"/>
+          </a:xfrm>
+          <a:prstGeom prst="rect">
+            <a:avLst/>
+          </a:prstGeom>
+          <a:noFill/>
+        </p:spPr>
+        <p:txBody>
+          <a:bodyPr wrap="square">
+            <a:spAutoFit/>
+          </a:bodyPr>
+          <a:lstStyle/>
+          <a:p>
+            <a:pPr algn="l"/>
+            <a:r>
+              <a:rPr sz="1100" b="0" i="1">
+                <a:solidFill>
+                  <a:srgbClr val="616161"/>
+                </a:solidFill>
+                <a:latin typeface="Calibri"/>
+              </a:rPr>
+              <a:t>Contexto IBGE (2025): a qualidade de vida avancou (POF), mas a desigualdade de renda voltou a subir (Gini domiciliar per capita 0,491) — o avanco agregado nao fecha o gap racial documentado aqui.</a:t>
+            </a:r>
+          </a:p>
+        </p:txBody>
+      </p:sp>
+      <p:sp>
+        <p:nvSpPr>
+          <p:cNvPr id="38" name="Rectangle 37"/>
           <p:cNvSpPr/>
           <p:nvPr/>
         </p:nvSpPr>
@@ -5226,7 +5906,7 @@
       </p:sp>
       <p:sp>
         <p:nvSpPr>
-          <p:cNvPr id="38" name="TextBox 37"/>
+          <p:cNvPr id="39" name="TextBox 38"/>
           <p:cNvSpPr txBox="1"/>
           <p:nvPr/>
         </p:nvSpPr>
@@ -6076,7 +6756,7 @@
                 </a:solidFill>
                 <a:latin typeface="Calibri"/>
               </a:rPr>
-              <a:t>2/10</a:t>
+              <a:t>2/11</a:t>
             </a:r>
           </a:p>
         </p:txBody>
@@ -7222,7 +7902,7 @@
                 </a:solidFill>
                 <a:latin typeface="Calibri"/>
               </a:rPr>
-              <a:t>3/10</a:t>
+              <a:t>3/11</a:t>
             </a:r>
           </a:p>
         </p:txBody>
@@ -8308,7 +8988,7 @@
                 </a:solidFill>
                 <a:latin typeface="Calibri"/>
               </a:rPr>
-              <a:t>4/10</a:t>
+              <a:t>4/11</a:t>
             </a:r>
           </a:p>
         </p:txBody>
@@ -8737,7 +9417,7 @@
                 </a:solidFill>
                 <a:latin typeface="Calibri"/>
               </a:rPr>
-              <a:t>−4,75 p.p.</a:t>
+              <a:t>−4,73 p.p.</a:t>
             </a:r>
           </a:p>
         </p:txBody>
@@ -9388,7 +10068,7 @@
                 </a:solidFill>
                 <a:latin typeface="Calibri"/>
               </a:rPr>
-              <a:t>5/10</a:t>
+              <a:t>5/11</a:t>
             </a:r>
           </a:p>
         </p:txBody>
@@ -10323,7 +11003,7 @@
                 </a:solidFill>
                 <a:latin typeface="Calibri"/>
               </a:rPr>
-              <a:t>6/10</a:t>
+              <a:t>6/11</a:t>
             </a:r>
           </a:p>
         </p:txBody>
@@ -10844,7 +11524,7 @@
                 </a:solidFill>
                 <a:latin typeface="Calibri"/>
               </a:rPr>
-              <a:t>7/10</a:t>
+              <a:t>7/11</a:t>
             </a:r>
           </a:p>
         </p:txBody>
@@ -11997,7 +12677,7 @@
                 </a:solidFill>
                 <a:latin typeface="Calibri"/>
               </a:rPr>
-              <a:t>8/10</a:t>
+              <a:t>8/11</a:t>
             </a:r>
           </a:p>
         </p:txBody>
@@ -14061,7 +14741,7 @@
                 </a:solidFill>
                 <a:latin typeface="Calibri"/>
               </a:rPr>
-              <a:t>9/10</a:t>
+              <a:t>9/11</a:t>
             </a:r>
           </a:p>
         </p:txBody>
